--- a/yago_ionv/figures.pptx
+++ b/yago_ionv/figures.pptx
@@ -11,6 +11,9 @@
     <p:sldId id="259" r:id="rId10"/>
     <p:sldId id="260" r:id="rId11"/>
     <p:sldId id="261" r:id="rId12"/>
+    <p:sldId id="262" r:id="rId13"/>
+    <p:sldId id="263" r:id="rId14"/>
+    <p:sldId id="264" r:id="rId15"/>
   </p:sldIdLst>
   <p:sldSz cx="12191695" cy="6858000" type="screen4x3"/>
   <p:notesSz cx="6858000" cy="9144000"/>
@@ -3492,6 +3495,225 @@
       <p:pic>
         <p:nvPicPr>
           <p:cNvPr id="3" name="Picture 2" descr="fig6_antiemetic_drugs.png"/>
+          <p:cNvPicPr>
+            <a:picLocks noChangeAspect="1"/>
+          </p:cNvPicPr>
+          <p:nvPr/>
+        </p:nvPicPr>
+        <p:blipFill>
+          <a:blip r:embed="rId2"/>
+          <a:stretch>
+            <a:fillRect/>
+          </a:stretch>
+        </p:blipFill>
+        <p:spPr>
+          <a:xfrm>
+            <a:off x="1371600" y="914400"/>
+            <a:ext cx="9144000" cy="5029200"/>
+          </a:xfrm>
+          <a:prstGeom prst="rect">
+            <a:avLst/>
+          </a:prstGeom>
+        </p:spPr>
+      </p:pic>
+    </p:spTree>
+  </p:cSld>
+  <p:clrMapOvr>
+    <a:masterClrMapping/>
+  </p:clrMapOvr>
+</p:sld>
+</file>
+
+<file path=ppt/slides/slide7.xml><?xml version="1.0" encoding="utf-8"?>
+<p:sld xmlns:a="http://schemas.openxmlformats.org/drawingml/2006/main" xmlns:p="http://schemas.openxmlformats.org/presentationml/2006/main" xmlns:r="http://schemas.openxmlformats.org/officeDocument/2006/relationships">
+  <p:cSld>
+    <p:spTree>
+      <p:nvGrpSpPr>
+        <p:cNvPr id="1" name=""/>
+        <p:cNvGrpSpPr/>
+        <p:nvPr/>
+      </p:nvGrpSpPr>
+      <p:grpSpPr/>
+      <p:sp>
+        <p:nvSpPr>
+          <p:cNvPr id="2" name="TextBox 1"/>
+          <p:cNvSpPr txBox="1"/>
+          <p:nvPr/>
+        </p:nvSpPr>
+        <p:spPr>
+          <a:xfrm>
+            <a:off x="457200" y="182880"/>
+            <a:ext cx="10972800" cy="548640"/>
+          </a:xfrm>
+          <a:prstGeom prst="rect">
+            <a:avLst/>
+          </a:prstGeom>
+          <a:noFill/>
+        </p:spPr>
+        <p:txBody>
+          <a:bodyPr wrap="none">
+            <a:spAutoFit/>
+          </a:bodyPr>
+          <a:lstStyle/>
+          <a:p>
+            <a:pPr>
+              <a:defRPr sz="2000" b="1"/>
+            </a:pPr>
+            <a:r>
+              <a:t>Figure 7: Sensitivity — Twin aOR Across Definitions</a:t>
+            </a:r>
+          </a:p>
+        </p:txBody>
+      </p:sp>
+      <p:pic>
+        <p:nvPicPr>
+          <p:cNvPr id="3" name="Picture 2" descr="fig7_sensitivity_forest.png"/>
+          <p:cNvPicPr>
+            <a:picLocks noChangeAspect="1"/>
+          </p:cNvPicPr>
+          <p:nvPr/>
+        </p:nvPicPr>
+        <p:blipFill>
+          <a:blip r:embed="rId2"/>
+          <a:stretch>
+            <a:fillRect/>
+          </a:stretch>
+        </p:blipFill>
+        <p:spPr>
+          <a:xfrm>
+            <a:off x="1371600" y="914400"/>
+            <a:ext cx="9144000" cy="5029200"/>
+          </a:xfrm>
+          <a:prstGeom prst="rect">
+            <a:avLst/>
+          </a:prstGeom>
+        </p:spPr>
+      </p:pic>
+    </p:spTree>
+  </p:cSld>
+  <p:clrMapOvr>
+    <a:masterClrMapping/>
+  </p:clrMapOvr>
+</p:sld>
+</file>
+
+<file path=ppt/slides/slide8.xml><?xml version="1.0" encoding="utf-8"?>
+<p:sld xmlns:a="http://schemas.openxmlformats.org/drawingml/2006/main" xmlns:p="http://schemas.openxmlformats.org/presentationml/2006/main" xmlns:r="http://schemas.openxmlformats.org/officeDocument/2006/relationships">
+  <p:cSld>
+    <p:spTree>
+      <p:nvGrpSpPr>
+        <p:cNvPr id="1" name=""/>
+        <p:cNvGrpSpPr/>
+        <p:nvPr/>
+      </p:nvGrpSpPr>
+      <p:grpSpPr/>
+      <p:sp>
+        <p:nvSpPr>
+          <p:cNvPr id="2" name="TextBox 1"/>
+          <p:cNvSpPr txBox="1"/>
+          <p:nvPr/>
+        </p:nvSpPr>
+        <p:spPr>
+          <a:xfrm>
+            <a:off x="457200" y="182880"/>
+            <a:ext cx="10972800" cy="548640"/>
+          </a:xfrm>
+          <a:prstGeom prst="rect">
+            <a:avLst/>
+          </a:prstGeom>
+          <a:noFill/>
+        </p:spPr>
+        <p:txBody>
+          <a:bodyPr wrap="none">
+            <a:spAutoFit/>
+          </a:bodyPr>
+          <a:lstStyle/>
+          <a:p>
+            <a:pPr>
+              <a:defRPr sz="2000" b="1"/>
+            </a:pPr>
+            <a:r>
+              <a:t>Figure 8: Sensitivity — IONV Rates by Definition</a:t>
+            </a:r>
+          </a:p>
+        </p:txBody>
+      </p:sp>
+      <p:pic>
+        <p:nvPicPr>
+          <p:cNvPr id="3" name="Picture 2" descr="fig8_sensitivity_rates.png"/>
+          <p:cNvPicPr>
+            <a:picLocks noChangeAspect="1"/>
+          </p:cNvPicPr>
+          <p:nvPr/>
+        </p:nvPicPr>
+        <p:blipFill>
+          <a:blip r:embed="rId2"/>
+          <a:stretch>
+            <a:fillRect/>
+          </a:stretch>
+        </p:blipFill>
+        <p:spPr>
+          <a:xfrm>
+            <a:off x="1371600" y="914400"/>
+            <a:ext cx="9144000" cy="5029200"/>
+          </a:xfrm>
+          <a:prstGeom prst="rect">
+            <a:avLst/>
+          </a:prstGeom>
+        </p:spPr>
+      </p:pic>
+    </p:spTree>
+  </p:cSld>
+  <p:clrMapOvr>
+    <a:masterClrMapping/>
+  </p:clrMapOvr>
+</p:sld>
+</file>
+
+<file path=ppt/slides/slide9.xml><?xml version="1.0" encoding="utf-8"?>
+<p:sld xmlns:a="http://schemas.openxmlformats.org/drawingml/2006/main" xmlns:p="http://schemas.openxmlformats.org/presentationml/2006/main" xmlns:r="http://schemas.openxmlformats.org/officeDocument/2006/relationships">
+  <p:cSld>
+    <p:spTree>
+      <p:nvGrpSpPr>
+        <p:cNvPr id="1" name=""/>
+        <p:cNvGrpSpPr/>
+        <p:nvPr/>
+      </p:nvGrpSpPr>
+      <p:grpSpPr/>
+      <p:sp>
+        <p:nvSpPr>
+          <p:cNvPr id="2" name="TextBox 1"/>
+          <p:cNvSpPr txBox="1"/>
+          <p:nvPr/>
+        </p:nvSpPr>
+        <p:spPr>
+          <a:xfrm>
+            <a:off x="457200" y="182880"/>
+            <a:ext cx="10972800" cy="548640"/>
+          </a:xfrm>
+          <a:prstGeom prst="rect">
+            <a:avLst/>
+          </a:prstGeom>
+          <a:noFill/>
+        </p:spPr>
+        <p:txBody>
+          <a:bodyPr wrap="none">
+            <a:spAutoFit/>
+          </a:bodyPr>
+          <a:lstStyle/>
+          <a:p>
+            <a:pPr>
+              <a:defRPr sz="2000" b="1"/>
+            </a:pPr>
+            <a:r>
+              <a:t>Figure 9: Definition H — Hypotension-Stratified IONV</a:t>
+            </a:r>
+          </a:p>
+        </p:txBody>
+      </p:sp>
+      <p:pic>
+        <p:nvPicPr>
+          <p:cNvPr id="3" name="Picture 2" descr="fig9_stratified_hypotension.png"/>
           <p:cNvPicPr>
             <a:picLocks noChangeAspect="1"/>
           </p:cNvPicPr>
